--- a/dist/초2/철학·논리·심리·교육·종교/학습습관/초2_철학·논리·심리·교육·종교_학습습관_01_계획·실행·돌아보기_학생용.pptx
+++ b/dist/초2/철학·논리·심리·교육·종교/학습습관/초2_철학·논리·심리·교육·종교_학습습관_01_계획·실행·돌아보기_학생용.pptx
@@ -119,20 +119,20 @@
   <p:extLst>
     <p:ext uri="{521415D9-36F7-43E2-AB2F-B90AF26B5E84}">
       <p14:sectionLst xmlns:p14="http://schemas.microsoft.com/office/powerpoint/2010/main">
-        <p14:section name="도입" id="{c6a8cf38-5999-3fd4-5073-eaa2642c18b6}">
+        <p14:section name="도입" id="{e5caf948-0d35-3ecf-1c23-44e419df5422}">
           <p14:sldIdLst>
             <p14:sldId id="256"/>
             <p14:sldId id="257"/>
           </p14:sldIdLst>
         </p14:section>
-        <p14:section name="개념" id="{56ded820-f7a0-b2de-a24a-6405d61174b2}">
+        <p14:section name="개념" id="{b9adc46c-3dc3-5fda-1e60-88f397307f48}">
           <p14:sldIdLst>
             <p14:sldId id="258"/>
             <p14:sldId id="259"/>
             <p14:sldId id="263"/>
           </p14:sldIdLst>
         </p14:section>
-        <p14:section name="연습" id="{da485c40-a5e6-f359-c375-b9295131d84c}">
+        <p14:section name="연습" id="{30e5642f-ab2e-4d6a-d2b0-00293f3922a1}">
           <p14:sldIdLst>
             <p14:sldId id="260"/>
             <p14:sldId id="261"/>
@@ -140,24 +140,24 @@
             <p14:sldId id="264"/>
           </p14:sldIdLst>
         </p14:section>
-        <p14:section name="개념" id="{7eb0138f-f7d0-257d-75bf-8416bfea3818}">
+        <p14:section name="개념" id="{a61f9856-d0bf-4d23-2d58-f6f8d7969517}">
           <p14:sldIdLst/>
         </p14:section>
-        <p14:section name="연습" id="{347ff986-150b-1e70-05fd-155b55cf596b}">
+        <p14:section name="연습" id="{f4cf3f55-9a79-d25f-3ab9-6f82800be5d3}">
           <p14:sldIdLst/>
         </p14:section>
-        <p14:section name="확인" id="{b69f313b-e33b-d8f9-117f-58586a6772ce}">
+        <p14:section name="확인" id="{448049c3-7366-48fb-cb50-1319b5e0b99b}">
           <p14:sldIdLst>
             <p14:sldId id="265"/>
             <p14:sldId id="266"/>
           </p14:sldIdLst>
         </p14:section>
-        <p14:section name="정리" id="{f5b3a53a-5c92-5d48-e7ef-db85d5d75c9e}">
+        <p14:section name="정리" id="{c62a680f-b3eb-3eb5-05ad-61133864ca16}">
           <p14:sldIdLst>
             <p14:sldId id="267"/>
           </p14:sldIdLst>
         </p14:section>
-        <p14:section name="보충" id="{23b7cfac-987d-e100-5c5a-c6b53a9530c1}">
+        <p14:section name="보충" id="{ce6447cd-53e0-41ba-59d8-533e76d94cc9}">
           <p14:sldIdLst>
             <p14:sldId id="268"/>
           </p14:sldIdLst>
